--- a/Python/Lesson 10 - HTTP and APIs/HTTP and APIs.pptx
+++ b/Python/Lesson 10 - HTTP and APIs/HTTP and APIs.pptx
@@ -5,7 +5,7 @@
     <p:sldMasterId id="2147483660" r:id="rId1"/>
   </p:sldMasterIdLst>
   <p:notesMasterIdLst>
-    <p:notesMasterId r:id="rId10"/>
+    <p:notesMasterId r:id="rId16"/>
   </p:notesMasterIdLst>
   <p:sldIdLst>
     <p:sldId id="256" r:id="rId2"/>
@@ -15,7 +15,13 @@
     <p:sldId id="1271" r:id="rId6"/>
     <p:sldId id="286" r:id="rId7"/>
     <p:sldId id="1272" r:id="rId8"/>
-    <p:sldId id="284" r:id="rId9"/>
+    <p:sldId id="1275" r:id="rId9"/>
+    <p:sldId id="1276" r:id="rId10"/>
+    <p:sldId id="1278" r:id="rId11"/>
+    <p:sldId id="1279" r:id="rId12"/>
+    <p:sldId id="1273" r:id="rId13"/>
+    <p:sldId id="1274" r:id="rId14"/>
+    <p:sldId id="284" r:id="rId15"/>
   </p:sldIdLst>
   <p:sldSz cx="12192000" cy="6858000"/>
   <p:notesSz cx="6858000" cy="9144000"/>
@@ -204,7 +210,7 @@
           <a:p>
             <a:fld id="{7D2F5B96-EC90-4B10-91AC-E32DA21E81E1}" type="datetimeFigureOut">
               <a:rPr lang="en-US" smtClean="0"/>
-              <a:t>6/18/2026</a:t>
+              <a:t>22-Jun-26</a:t>
             </a:fld>
             <a:endParaRPr lang="en-US"/>
           </a:p>
@@ -964,6 +970,186 @@
 </p:notes>
 </file>
 
+<file path=ppt/notesSlides/notesSlide6.xml><?xml version="1.0" encoding="utf-8"?>
+<p:notes xmlns:a="http://schemas.openxmlformats.org/drawingml/2006/main" xmlns:r="http://schemas.openxmlformats.org/officeDocument/2006/relationships" xmlns:p="http://schemas.openxmlformats.org/presentationml/2006/main">
+  <p:cSld>
+    <p:spTree>
+      <p:nvGrpSpPr>
+        <p:cNvPr id="1" name=""/>
+        <p:cNvGrpSpPr/>
+        <p:nvPr/>
+      </p:nvGrpSpPr>
+      <p:grpSpPr>
+        <a:xfrm>
+          <a:off x="0" y="0"/>
+          <a:ext cx="0" cy="0"/>
+          <a:chOff x="0" y="0"/>
+          <a:chExt cx="0" cy="0"/>
+        </a:xfrm>
+      </p:grpSpPr>
+      <p:sp>
+        <p:nvSpPr>
+          <p:cNvPr id="2" name="Slide Image Placeholder 1"/>
+          <p:cNvSpPr>
+            <a:spLocks noGrp="1" noRot="1" noChangeAspect="1"/>
+          </p:cNvSpPr>
+          <p:nvPr>
+            <p:ph type="sldImg"/>
+          </p:nvPr>
+        </p:nvSpPr>
+        <p:spPr/>
+      </p:sp>
+      <p:sp>
+        <p:nvSpPr>
+          <p:cNvPr id="3" name="Notes Placeholder 2"/>
+          <p:cNvSpPr>
+            <a:spLocks noGrp="1"/>
+          </p:cNvSpPr>
+          <p:nvPr>
+            <p:ph type="body" idx="1"/>
+          </p:nvPr>
+        </p:nvSpPr>
+        <p:spPr/>
+        <p:txBody>
+          <a:bodyPr/>
+          <a:lstStyle/>
+          <a:p>
+            <a:r>
+              <a:rPr lang="en-US" dirty="0"/>
+              <a:t>https://base64.dev/articles/what-is-base64</a:t>
+            </a:r>
+          </a:p>
+        </p:txBody>
+      </p:sp>
+      <p:sp>
+        <p:nvSpPr>
+          <p:cNvPr id="4" name="Slide Number Placeholder 3"/>
+          <p:cNvSpPr>
+            <a:spLocks noGrp="1"/>
+          </p:cNvSpPr>
+          <p:nvPr>
+            <p:ph type="sldNum" sz="quarter" idx="5"/>
+          </p:nvPr>
+        </p:nvSpPr>
+        <p:spPr/>
+        <p:txBody>
+          <a:bodyPr/>
+          <a:lstStyle/>
+          <a:p>
+            <a:fld id="{BE457D5F-ED05-449E-97D0-205DAB987247}" type="slidenum">
+              <a:rPr lang="en-US" smtClean="0"/>
+              <a:t>10</a:t>
+            </a:fld>
+            <a:endParaRPr lang="en-US"/>
+          </a:p>
+        </p:txBody>
+      </p:sp>
+    </p:spTree>
+    <p:extLst>
+      <p:ext uri="{BB962C8B-B14F-4D97-AF65-F5344CB8AC3E}">
+        <p14:creationId xmlns:p14="http://schemas.microsoft.com/office/powerpoint/2010/main" val="2920093684"/>
+      </p:ext>
+    </p:extLst>
+  </p:cSld>
+  <p:clrMapOvr>
+    <a:masterClrMapping/>
+  </p:clrMapOvr>
+</p:notes>
+</file>
+
+<file path=ppt/notesSlides/notesSlide7.xml><?xml version="1.0" encoding="utf-8"?>
+<p:notes xmlns:a="http://schemas.openxmlformats.org/drawingml/2006/main" xmlns:r="http://schemas.openxmlformats.org/officeDocument/2006/relationships" xmlns:p="http://schemas.openxmlformats.org/presentationml/2006/main">
+  <p:cSld>
+    <p:spTree>
+      <p:nvGrpSpPr>
+        <p:cNvPr id="1" name=""/>
+        <p:cNvGrpSpPr/>
+        <p:nvPr/>
+      </p:nvGrpSpPr>
+      <p:grpSpPr>
+        <a:xfrm>
+          <a:off x="0" y="0"/>
+          <a:ext cx="0" cy="0"/>
+          <a:chOff x="0" y="0"/>
+          <a:chExt cx="0" cy="0"/>
+        </a:xfrm>
+      </p:grpSpPr>
+      <p:sp>
+        <p:nvSpPr>
+          <p:cNvPr id="2" name="Slide Image Placeholder 1"/>
+          <p:cNvSpPr>
+            <a:spLocks noGrp="1" noRot="1" noChangeAspect="1"/>
+          </p:cNvSpPr>
+          <p:nvPr>
+            <p:ph type="sldImg"/>
+          </p:nvPr>
+        </p:nvSpPr>
+        <p:spPr/>
+      </p:sp>
+      <p:sp>
+        <p:nvSpPr>
+          <p:cNvPr id="3" name="Notes Placeholder 2"/>
+          <p:cNvSpPr>
+            <a:spLocks noGrp="1"/>
+          </p:cNvSpPr>
+          <p:nvPr>
+            <p:ph type="body" idx="1"/>
+          </p:nvPr>
+        </p:nvSpPr>
+        <p:spPr/>
+        <p:txBody>
+          <a:bodyPr/>
+          <a:lstStyle/>
+          <a:p>
+            <a:r>
+              <a:rPr lang="en-US" dirty="0"/>
+              <a:t>base64.b64encode</a:t>
+            </a:r>
+          </a:p>
+          <a:p>
+            <a:r>
+              <a:rPr lang="en-US" dirty="0"/>
+              <a:t>base64.b64decode</a:t>
+            </a:r>
+          </a:p>
+        </p:txBody>
+      </p:sp>
+      <p:sp>
+        <p:nvSpPr>
+          <p:cNvPr id="4" name="Slide Number Placeholder 3"/>
+          <p:cNvSpPr>
+            <a:spLocks noGrp="1"/>
+          </p:cNvSpPr>
+          <p:nvPr>
+            <p:ph type="sldNum" sz="quarter" idx="5"/>
+          </p:nvPr>
+        </p:nvSpPr>
+        <p:spPr/>
+        <p:txBody>
+          <a:bodyPr/>
+          <a:lstStyle/>
+          <a:p>
+            <a:fld id="{BE457D5F-ED05-449E-97D0-205DAB987247}" type="slidenum">
+              <a:rPr lang="en-US" smtClean="0"/>
+              <a:t>11</a:t>
+            </a:fld>
+            <a:endParaRPr lang="en-US"/>
+          </a:p>
+        </p:txBody>
+      </p:sp>
+    </p:spTree>
+    <p:extLst>
+      <p:ext uri="{BB962C8B-B14F-4D97-AF65-F5344CB8AC3E}">
+        <p14:creationId xmlns:p14="http://schemas.microsoft.com/office/powerpoint/2010/main" val="2843298489"/>
+      </p:ext>
+    </p:extLst>
+  </p:cSld>
+  <p:clrMapOvr>
+    <a:masterClrMapping/>
+  </p:clrMapOvr>
+</p:notes>
+</file>
+
 <file path=ppt/slideLayouts/slideLayout1.xml><?xml version="1.0" encoding="utf-8"?>
 <p:sldLayout xmlns:a="http://schemas.openxmlformats.org/drawingml/2006/main" xmlns:r="http://schemas.openxmlformats.org/officeDocument/2006/relationships" xmlns:p="http://schemas.openxmlformats.org/presentationml/2006/main" showMasterSp="0" preserve="1" userDrawn="1">
   <p:cSld name="Title Slide">
@@ -1012,7 +1198,7 @@
           <a:p>
             <a:fld id="{7A3E0868-4E26-4CDC-8A56-D70E2D8B12FE}" type="datetime3">
               <a:rPr lang="en-US" smtClean="0"/>
-              <a:t>18 June 2026</a:t>
+              <a:t>22 June 2026</a:t>
             </a:fld>
             <a:endParaRPr lang="en-US"/>
           </a:p>
@@ -3591,7 +3777,7 @@
           <a:p>
             <a:fld id="{A7B8021B-6105-4216-96FC-94348F216D0E}" type="datetime3">
               <a:rPr lang="en-US" smtClean="0"/>
-              <a:t>18 June 2026</a:t>
+              <a:t>22 June 2026</a:t>
             </a:fld>
             <a:endParaRPr lang="en-US"/>
           </a:p>
@@ -5312,7 +5498,7 @@
           <a:p>
             <a:fld id="{5D27CFAB-73E6-44A8-B862-B3306344E3F2}" type="datetime3">
               <a:rPr lang="en-US" smtClean="0"/>
-              <a:t>18 June 2026</a:t>
+              <a:t>22 June 2026</a:t>
             </a:fld>
             <a:endParaRPr lang="en-US"/>
           </a:p>
@@ -7126,7 +7312,7 @@
           <a:p>
             <a:fld id="{A9B2E784-A5F5-4301-881B-94AC8DBF9DED}" type="datetime3">
               <a:rPr lang="en-US" smtClean="0"/>
-              <a:t>18 June 2026</a:t>
+              <a:t>22 June 2026</a:t>
             </a:fld>
             <a:endParaRPr lang="en-US"/>
           </a:p>
@@ -7308,7 +7494,7 @@
           <a:p>
             <a:fld id="{18EAB3A5-9E92-4BB9-8F22-9632B4FBEDBA}" type="datetime3">
               <a:rPr lang="en-US" smtClean="0"/>
-              <a:t>18 June 2026</a:t>
+              <a:t>22 June 2026</a:t>
             </a:fld>
             <a:endParaRPr lang="en-US"/>
           </a:p>
@@ -7538,7 +7724,7 @@
           <a:p>
             <a:fld id="{40923810-5FB2-48C9-96CA-1DE2C4773142}" type="datetime3">
               <a:rPr lang="en-US" smtClean="0"/>
-              <a:t>18 June 2026</a:t>
+              <a:t>22 June 2026</a:t>
             </a:fld>
             <a:endParaRPr lang="en-US"/>
           </a:p>
@@ -7837,7 +8023,7 @@
           <a:p>
             <a:fld id="{E50EFF4B-86EB-42FB-93EA-7D8F9CB2466F}" type="datetime3">
               <a:rPr lang="en-US" smtClean="0"/>
-              <a:t>18 June 2026</a:t>
+              <a:t>22 June 2026</a:t>
             </a:fld>
             <a:endParaRPr lang="en-US"/>
           </a:p>
@@ -8467,7 +8653,7 @@
           <a:p>
             <a:fld id="{FB14FC24-E041-45E9-9A72-E5755A86890F}" type="datetime3">
               <a:rPr lang="en-US" smtClean="0"/>
-              <a:t>18 June 2026</a:t>
+              <a:t>22 June 2026</a:t>
             </a:fld>
             <a:endParaRPr lang="en-US"/>
           </a:p>
@@ -9354,7 +9540,7 @@
           <a:p>
             <a:fld id="{98A19125-94A7-4474-858C-FD9C4ABE9DDA}" type="datetime3">
               <a:rPr lang="en-US" smtClean="0"/>
-              <a:t>18 June 2026</a:t>
+              <a:t>22 June 2026</a:t>
             </a:fld>
             <a:endParaRPr lang="en-US"/>
           </a:p>
@@ -10493,7 +10679,7 @@
           <a:p>
             <a:fld id="{3BA0343D-C8D8-43CE-BB79-50DEA219DB07}" type="datetime3">
               <a:rPr lang="en-US" smtClean="0"/>
-              <a:t>18 June 2026</a:t>
+              <a:t>22 June 2026</a:t>
             </a:fld>
             <a:endParaRPr lang="en-US"/>
           </a:p>
@@ -10785,7 +10971,7 @@
           <a:p>
             <a:fld id="{453BD212-0B9F-4987-965F-AC83B2FC354F}" type="datetime3">
               <a:rPr lang="en-US" smtClean="0"/>
-              <a:t>18 June 2026</a:t>
+              <a:t>22 June 2026</a:t>
             </a:fld>
             <a:endParaRPr lang="en-US"/>
           </a:p>
@@ -11030,7 +11216,7 @@
           <a:p>
             <a:fld id="{6DDC931E-8CBE-4A3F-A034-9B6122C6DCDB}" type="datetime3">
               <a:rPr lang="en-US" smtClean="0"/>
-              <a:t>18 June 2026</a:t>
+              <a:t>22 June 2026</a:t>
             </a:fld>
             <a:endParaRPr lang="en-US"/>
           </a:p>
@@ -12808,7 +12994,7 @@
           <a:p>
             <a:fld id="{220AF9C2-5E8A-4308-AE6B-CA9B65007D0E}" type="datetime3">
               <a:rPr lang="en-US" smtClean="0"/>
-              <a:t>18 June 2026</a:t>
+              <a:t>22 June 2026</a:t>
             </a:fld>
             <a:endParaRPr lang="en-US"/>
           </a:p>
@@ -13124,7 +13310,7 @@
           <a:p>
             <a:fld id="{FF31E861-D2AF-431D-860B-DCF67C218052}" type="datetime3">
               <a:rPr lang="en-US" smtClean="0"/>
-              <a:t>18 June 2026</a:t>
+              <a:t>22 June 2026</a:t>
             </a:fld>
             <a:endParaRPr lang="en-US"/>
           </a:p>
@@ -13406,7 +13592,7 @@
           <a:p>
             <a:fld id="{D1DA25B2-AAF1-4C1F-AA38-12D5BFA7D4C8}" type="datetime3">
               <a:rPr lang="en-US" smtClean="0"/>
-              <a:t>18 June 2026</a:t>
+              <a:t>22 June 2026</a:t>
             </a:fld>
             <a:endParaRPr lang="en-US"/>
           </a:p>
@@ -13688,7 +13874,7 @@
           <a:p>
             <a:fld id="{A25C0F39-45D0-48E9-90B3-7FE8FCE561C8}" type="datetime3">
               <a:rPr lang="en-US" smtClean="0"/>
-              <a:t>18 June 2026</a:t>
+              <a:t>22 June 2026</a:t>
             </a:fld>
             <a:endParaRPr lang="en-US"/>
           </a:p>
@@ -14198,7 +14384,7 @@
           <a:p>
             <a:fld id="{9BAF1A3D-92FA-4F24-9781-74AFA516A230}" type="datetime3">
               <a:rPr lang="en-US" smtClean="0"/>
-              <a:t>18 June 2026</a:t>
+              <a:t>22 June 2026</a:t>
             </a:fld>
             <a:endParaRPr lang="en-US"/>
           </a:p>
@@ -14325,7 +14511,7 @@
           <a:p>
             <a:fld id="{5719C672-856D-4617-A693-8FE15749A9B7}" type="datetime3">
               <a:rPr lang="en-US" smtClean="0"/>
-              <a:t>18 June 2026</a:t>
+              <a:t>22 June 2026</a:t>
             </a:fld>
             <a:endParaRPr lang="en-US"/>
           </a:p>
@@ -14460,7 +14646,7 @@
           <a:p>
             <a:fld id="{5F6C764D-A39E-4C03-B161-E0BC66E8883B}" type="datetime3">
               <a:rPr lang="en-US" smtClean="0"/>
-              <a:t>18 June 2026</a:t>
+              <a:t>22 June 2026</a:t>
             </a:fld>
             <a:endParaRPr lang="en-US"/>
           </a:p>
@@ -14702,7 +14888,7 @@
           <a:p>
             <a:fld id="{6E3E33F9-20B7-4995-BE7D-165DBB597850}" type="datetime3">
               <a:rPr lang="en-US" smtClean="0"/>
-              <a:t>18 June 2026</a:t>
+              <a:t>22 June 2026</a:t>
             </a:fld>
             <a:endParaRPr lang="en-US"/>
           </a:p>
@@ -14815,7 +15001,7 @@
           <a:p>
             <a:fld id="{CD41C263-3501-4369-A962-62B6BF915CDE}" type="datetime3">
               <a:rPr lang="en-US" smtClean="0"/>
-              <a:t>18 June 2026</a:t>
+              <a:t>22 June 2026</a:t>
             </a:fld>
             <a:endParaRPr lang="en-US"/>
           </a:p>
@@ -15221,7 +15407,7 @@
           <a:p>
             <a:fld id="{B06F3EBE-B2E8-4992-9F00-9E4B44F057C0}" type="datetime3">
               <a:rPr lang="en-US" smtClean="0"/>
-              <a:t>18 June 2026</a:t>
+              <a:t>22 June 2026</a:t>
             </a:fld>
             <a:endParaRPr lang="en-US"/>
           </a:p>
@@ -15353,7 +15539,7 @@
           <a:p>
             <a:fld id="{D41656AB-D2E1-472E-8B95-0DF5C6E1D623}" type="datetime3">
               <a:rPr lang="en-US" smtClean="0"/>
-              <a:t>18 June 2026</a:t>
+              <a:t>22 June 2026</a:t>
             </a:fld>
             <a:endParaRPr lang="en-US"/>
           </a:p>
@@ -19545,7 +19731,7 @@
           <a:p>
             <a:fld id="{AD3160A9-B1E4-4AE8-B854-46ED2C2068C2}" type="datetimeFigureOut">
               <a:rPr lang="en-US" smtClean="0"/>
-              <a:t>6/18/2026</a:t>
+              <a:t>22-Jun-26</a:t>
             </a:fld>
             <a:endParaRPr lang="en-US"/>
           </a:p>
@@ -19957,7 +20143,7 @@
           <a:p>
             <a:fld id="{AD3160A9-B1E4-4AE8-B854-46ED2C2068C2}" type="datetimeFigureOut">
               <a:rPr lang="en-US" smtClean="0"/>
-              <a:t>6/18/2026</a:t>
+              <a:t>22-Jun-26</a:t>
             </a:fld>
             <a:endParaRPr lang="en-US"/>
           </a:p>
@@ -20232,7 +20418,7 @@
           <a:p>
             <a:fld id="{AD3160A9-B1E4-4AE8-B854-46ED2C2068C2}" type="datetimeFigureOut">
               <a:rPr lang="en-US" smtClean="0"/>
-              <a:t>6/18/2026</a:t>
+              <a:t>22-Jun-26</a:t>
             </a:fld>
             <a:endParaRPr lang="en-US"/>
           </a:p>
@@ -20431,7 +20617,7 @@
           <a:p>
             <a:fld id="{AD622D1A-DF83-41A8-85FF-04D90BF831D3}" type="datetime3">
               <a:rPr lang="en-US" smtClean="0"/>
-              <a:t>18 June 2026</a:t>
+              <a:t>22 June 2026</a:t>
             </a:fld>
             <a:endParaRPr lang="en-US"/>
           </a:p>
@@ -20687,7 +20873,7 @@
           <a:p>
             <a:fld id="{334F72C3-CDF3-44A8-B602-1649B1728485}" type="datetime3">
               <a:rPr lang="en-US" smtClean="0"/>
-              <a:t>18 June 2026</a:t>
+              <a:t>22 June 2026</a:t>
             </a:fld>
             <a:endParaRPr lang="en-US"/>
           </a:p>
@@ -21003,7 +21189,7 @@
           <a:p>
             <a:fld id="{1E0132BA-B5E7-4FFD-AF6C-169169D47D4A}" type="datetime3">
               <a:rPr lang="en-US" smtClean="0"/>
-              <a:t>18 June 2026</a:t>
+              <a:t>22 June 2026</a:t>
             </a:fld>
             <a:endParaRPr lang="en-US"/>
           </a:p>
@@ -21496,7 +21682,7 @@
           <a:p>
             <a:fld id="{81A30091-1C2A-4151-8D3C-D1E47A72615F}" type="datetime3">
               <a:rPr lang="en-US" smtClean="0"/>
-              <a:t>18 June 2026</a:t>
+              <a:t>22 June 2026</a:t>
             </a:fld>
             <a:endParaRPr lang="en-US"/>
           </a:p>
@@ -22157,7 +22343,7 @@
           <a:p>
             <a:fld id="{35D703CE-07B4-4C05-A488-B4566700621F}" type="datetime3">
               <a:rPr lang="en-US" smtClean="0"/>
-              <a:t>18 June 2026</a:t>
+              <a:t>22 June 2026</a:t>
             </a:fld>
             <a:endParaRPr lang="en-US"/>
           </a:p>
@@ -23227,7 +23413,7 @@
           <a:p>
             <a:fld id="{694BD61C-20BA-43AF-A21F-1DAFB3200099}" type="datetime3">
               <a:rPr lang="en-US" smtClean="0"/>
-              <a:t>18 June 2026</a:t>
+              <a:t>22 June 2026</a:t>
             </a:fld>
             <a:endParaRPr lang="en-US"/>
           </a:p>
@@ -23714,7 +23900,7 @@
           <a:p>
             <a:fld id="{CABCB1B0-B6E5-4DD1-BB55-95C076D6C0C8}" type="datetime3">
               <a:rPr lang="en-US" smtClean="0"/>
-              <a:t>18 June 2026</a:t>
+              <a:t>22 June 2026</a:t>
             </a:fld>
             <a:endParaRPr lang="en-US"/>
           </a:p>
@@ -24593,6 +24779,672 @@
 </p:sld>
 </file>
 
+<file path=ppt/slides/slide10.xml><?xml version="1.0" encoding="utf-8"?>
+<p:sld xmlns:a="http://schemas.openxmlformats.org/drawingml/2006/main" xmlns:r="http://schemas.openxmlformats.org/officeDocument/2006/relationships" xmlns:p="http://schemas.openxmlformats.org/presentationml/2006/main">
+  <p:cSld>
+    <p:spTree>
+      <p:nvGrpSpPr>
+        <p:cNvPr id="1" name=""/>
+        <p:cNvGrpSpPr/>
+        <p:nvPr/>
+      </p:nvGrpSpPr>
+      <p:grpSpPr>
+        <a:xfrm>
+          <a:off x="0" y="0"/>
+          <a:ext cx="0" cy="0"/>
+          <a:chOff x="0" y="0"/>
+          <a:chExt cx="0" cy="0"/>
+        </a:xfrm>
+      </p:grpSpPr>
+      <p:sp>
+        <p:nvSpPr>
+          <p:cNvPr id="2" name="Title 1">
+            <a:extLst>
+              <a:ext uri="{FF2B5EF4-FFF2-40B4-BE49-F238E27FC236}">
+                <a16:creationId xmlns:a16="http://schemas.microsoft.com/office/drawing/2014/main" id="{EB4F08CA-D795-8DD2-5A17-357D299D6CE4}"/>
+              </a:ext>
+            </a:extLst>
+          </p:cNvPr>
+          <p:cNvSpPr>
+            <a:spLocks noGrp="1"/>
+          </p:cNvSpPr>
+          <p:nvPr>
+            <p:ph type="title"/>
+          </p:nvPr>
+        </p:nvSpPr>
+        <p:spPr/>
+        <p:txBody>
+          <a:bodyPr/>
+          <a:lstStyle/>
+          <a:p>
+            <a:r>
+              <a:rPr lang="en-US" dirty="0"/>
+              <a:t>Base64 Encoding</a:t>
+            </a:r>
+          </a:p>
+        </p:txBody>
+      </p:sp>
+      <p:sp>
+        <p:nvSpPr>
+          <p:cNvPr id="3" name="Content Placeholder 2">
+            <a:extLst>
+              <a:ext uri="{FF2B5EF4-FFF2-40B4-BE49-F238E27FC236}">
+                <a16:creationId xmlns:a16="http://schemas.microsoft.com/office/drawing/2014/main" id="{4EFF6918-E014-7E4F-ADD7-66181B6A7BBC}"/>
+              </a:ext>
+            </a:extLst>
+          </p:cNvPr>
+          <p:cNvSpPr>
+            <a:spLocks noGrp="1"/>
+          </p:cNvSpPr>
+          <p:nvPr>
+            <p:ph idx="1"/>
+          </p:nvPr>
+        </p:nvSpPr>
+        <p:spPr/>
+        <p:txBody>
+          <a:bodyPr/>
+          <a:lstStyle/>
+          <a:p>
+            <a:r>
+              <a:rPr lang="en-US" dirty="0"/>
+              <a:t>Common HTTP encoding type</a:t>
+            </a:r>
+          </a:p>
+          <a:p>
+            <a:r>
+              <a:rPr lang="en-US" dirty="0"/>
+              <a:t>Converts every 6 bits into a character (2^6 options…)</a:t>
+            </a:r>
+          </a:p>
+          <a:p>
+            <a:pPr lvl="1"/>
+            <a:r>
+              <a:rPr lang="en-US" dirty="0"/>
+              <a:t>A-Z</a:t>
+            </a:r>
+          </a:p>
+          <a:p>
+            <a:pPr lvl="1"/>
+            <a:r>
+              <a:rPr lang="en-US" dirty="0"/>
+              <a:t>a-z</a:t>
+            </a:r>
+          </a:p>
+          <a:p>
+            <a:pPr lvl="1"/>
+            <a:r>
+              <a:rPr lang="en-US" dirty="0"/>
+              <a:t>0-9</a:t>
+            </a:r>
+          </a:p>
+          <a:p>
+            <a:pPr lvl="1"/>
+            <a:r>
+              <a:rPr lang="en-US" dirty="0"/>
+              <a:t>/+</a:t>
+            </a:r>
+          </a:p>
+          <a:p>
+            <a:r>
+              <a:rPr lang="en-US" dirty="0"/>
+              <a:t>Every 3 bytes </a:t>
+            </a:r>
+            <a:r>
+              <a:rPr lang="en-US" dirty="0">
+                <a:sym typeface="Wingdings" panose="05000000000000000000" pitchFamily="2" charset="2"/>
+              </a:rPr>
+              <a:t> 4 characters</a:t>
+            </a:r>
+            <a:endParaRPr lang="en-US" dirty="0"/>
+          </a:p>
+        </p:txBody>
+      </p:sp>
+      <p:sp>
+        <p:nvSpPr>
+          <p:cNvPr id="4" name="Date Placeholder 3">
+            <a:extLst>
+              <a:ext uri="{FF2B5EF4-FFF2-40B4-BE49-F238E27FC236}">
+                <a16:creationId xmlns:a16="http://schemas.microsoft.com/office/drawing/2014/main" id="{5739DEC8-5A35-75D5-9638-F56804F12339}"/>
+              </a:ext>
+            </a:extLst>
+          </p:cNvPr>
+          <p:cNvSpPr>
+            <a:spLocks noGrp="1"/>
+          </p:cNvSpPr>
+          <p:nvPr>
+            <p:ph type="dt" sz="half" idx="10"/>
+          </p:nvPr>
+        </p:nvSpPr>
+        <p:spPr/>
+        <p:txBody>
+          <a:bodyPr/>
+          <a:lstStyle/>
+          <a:p>
+            <a:fld id="{AD622D1A-DF83-41A8-85FF-04D90BF831D3}" type="datetime3">
+              <a:rPr lang="en-US" smtClean="0"/>
+              <a:t>22 June 2026</a:t>
+            </a:fld>
+            <a:endParaRPr lang="en-US"/>
+          </a:p>
+        </p:txBody>
+      </p:sp>
+      <p:sp>
+        <p:nvSpPr>
+          <p:cNvPr id="5" name="Slide Number Placeholder 4">
+            <a:extLst>
+              <a:ext uri="{FF2B5EF4-FFF2-40B4-BE49-F238E27FC236}">
+                <a16:creationId xmlns:a16="http://schemas.microsoft.com/office/drawing/2014/main" id="{CE6EEC28-5E34-E95E-9F52-6396E99760B3}"/>
+              </a:ext>
+            </a:extLst>
+          </p:cNvPr>
+          <p:cNvSpPr>
+            <a:spLocks noGrp="1"/>
+          </p:cNvSpPr>
+          <p:nvPr>
+            <p:ph type="sldNum" sz="quarter" idx="11"/>
+          </p:nvPr>
+        </p:nvSpPr>
+        <p:spPr/>
+        <p:txBody>
+          <a:bodyPr/>
+          <a:lstStyle/>
+          <a:p>
+            <a:fld id="{64E5BE4B-2FBF-4174-9E62-85FAD1CB43A6}" type="slidenum">
+              <a:rPr lang="en-US" smtClean="0"/>
+              <a:pPr/>
+              <a:t>10</a:t>
+            </a:fld>
+            <a:endParaRPr lang="en-US"/>
+          </a:p>
+        </p:txBody>
+      </p:sp>
+    </p:spTree>
+    <p:extLst>
+      <p:ext uri="{BB962C8B-B14F-4D97-AF65-F5344CB8AC3E}">
+        <p14:creationId xmlns:p14="http://schemas.microsoft.com/office/powerpoint/2010/main" val="3166557799"/>
+      </p:ext>
+    </p:extLst>
+  </p:cSld>
+  <p:clrMapOvr>
+    <a:masterClrMapping/>
+  </p:clrMapOvr>
+</p:sld>
+</file>
+
+<file path=ppt/slides/slide11.xml><?xml version="1.0" encoding="utf-8"?>
+<p:sld xmlns:a="http://schemas.openxmlformats.org/drawingml/2006/main" xmlns:r="http://schemas.openxmlformats.org/officeDocument/2006/relationships" xmlns:p="http://schemas.openxmlformats.org/presentationml/2006/main">
+  <p:cSld>
+    <p:spTree>
+      <p:nvGrpSpPr>
+        <p:cNvPr id="1" name=""/>
+        <p:cNvGrpSpPr/>
+        <p:nvPr/>
+      </p:nvGrpSpPr>
+      <p:grpSpPr>
+        <a:xfrm>
+          <a:off x="0" y="0"/>
+          <a:ext cx="0" cy="0"/>
+          <a:chOff x="0" y="0"/>
+          <a:chExt cx="0" cy="0"/>
+        </a:xfrm>
+      </p:grpSpPr>
+      <p:sp>
+        <p:nvSpPr>
+          <p:cNvPr id="2" name="Title 1">
+            <a:extLst>
+              <a:ext uri="{FF2B5EF4-FFF2-40B4-BE49-F238E27FC236}">
+                <a16:creationId xmlns:a16="http://schemas.microsoft.com/office/drawing/2014/main" id="{6916FF68-343E-F5F9-5A0C-85A025592E37}"/>
+              </a:ext>
+            </a:extLst>
+          </p:cNvPr>
+          <p:cNvSpPr>
+            <a:spLocks noGrp="1"/>
+          </p:cNvSpPr>
+          <p:nvPr>
+            <p:ph type="title"/>
+          </p:nvPr>
+        </p:nvSpPr>
+        <p:spPr/>
+        <p:txBody>
+          <a:bodyPr/>
+          <a:lstStyle/>
+          <a:p>
+            <a:r>
+              <a:rPr lang="en-US" dirty="0"/>
+              <a:t>Python Base64</a:t>
+            </a:r>
+          </a:p>
+        </p:txBody>
+      </p:sp>
+      <p:sp>
+        <p:nvSpPr>
+          <p:cNvPr id="3" name="Content Placeholder 2">
+            <a:extLst>
+              <a:ext uri="{FF2B5EF4-FFF2-40B4-BE49-F238E27FC236}">
+                <a16:creationId xmlns:a16="http://schemas.microsoft.com/office/drawing/2014/main" id="{3F545E95-C6A3-0E44-4BBF-21D1BEBD1591}"/>
+              </a:ext>
+            </a:extLst>
+          </p:cNvPr>
+          <p:cNvSpPr>
+            <a:spLocks noGrp="1"/>
+          </p:cNvSpPr>
+          <p:nvPr>
+            <p:ph idx="1"/>
+          </p:nvPr>
+        </p:nvSpPr>
+        <p:spPr/>
+        <p:txBody>
+          <a:bodyPr/>
+          <a:lstStyle/>
+          <a:p>
+            <a:r>
+              <a:rPr lang="en-US" dirty="0"/>
+              <a:t>Demo converting an image and some text</a:t>
+            </a:r>
+          </a:p>
+        </p:txBody>
+      </p:sp>
+      <p:sp>
+        <p:nvSpPr>
+          <p:cNvPr id="4" name="Date Placeholder 3">
+            <a:extLst>
+              <a:ext uri="{FF2B5EF4-FFF2-40B4-BE49-F238E27FC236}">
+                <a16:creationId xmlns:a16="http://schemas.microsoft.com/office/drawing/2014/main" id="{E72DAAB4-2CBE-DFF4-64DD-920615A57A26}"/>
+              </a:ext>
+            </a:extLst>
+          </p:cNvPr>
+          <p:cNvSpPr>
+            <a:spLocks noGrp="1"/>
+          </p:cNvSpPr>
+          <p:nvPr>
+            <p:ph type="dt" sz="half" idx="10"/>
+          </p:nvPr>
+        </p:nvSpPr>
+        <p:spPr/>
+        <p:txBody>
+          <a:bodyPr/>
+          <a:lstStyle/>
+          <a:p>
+            <a:fld id="{AD622D1A-DF83-41A8-85FF-04D90BF831D3}" type="datetime3">
+              <a:rPr lang="en-US" smtClean="0"/>
+              <a:t>22 June 2026</a:t>
+            </a:fld>
+            <a:endParaRPr lang="en-US"/>
+          </a:p>
+        </p:txBody>
+      </p:sp>
+      <p:sp>
+        <p:nvSpPr>
+          <p:cNvPr id="5" name="Slide Number Placeholder 4">
+            <a:extLst>
+              <a:ext uri="{FF2B5EF4-FFF2-40B4-BE49-F238E27FC236}">
+                <a16:creationId xmlns:a16="http://schemas.microsoft.com/office/drawing/2014/main" id="{7C0D0253-A895-1EE1-2013-EFC76909B4BD}"/>
+              </a:ext>
+            </a:extLst>
+          </p:cNvPr>
+          <p:cNvSpPr>
+            <a:spLocks noGrp="1"/>
+          </p:cNvSpPr>
+          <p:nvPr>
+            <p:ph type="sldNum" sz="quarter" idx="11"/>
+          </p:nvPr>
+        </p:nvSpPr>
+        <p:spPr/>
+        <p:txBody>
+          <a:bodyPr/>
+          <a:lstStyle/>
+          <a:p>
+            <a:fld id="{64E5BE4B-2FBF-4174-9E62-85FAD1CB43A6}" type="slidenum">
+              <a:rPr lang="en-US" smtClean="0"/>
+              <a:pPr/>
+              <a:t>11</a:t>
+            </a:fld>
+            <a:endParaRPr lang="en-US"/>
+          </a:p>
+        </p:txBody>
+      </p:sp>
+    </p:spTree>
+    <p:extLst>
+      <p:ext uri="{BB962C8B-B14F-4D97-AF65-F5344CB8AC3E}">
+        <p14:creationId xmlns:p14="http://schemas.microsoft.com/office/powerpoint/2010/main" val="2626205550"/>
+      </p:ext>
+    </p:extLst>
+  </p:cSld>
+  <p:clrMapOvr>
+    <a:masterClrMapping/>
+  </p:clrMapOvr>
+</p:sld>
+</file>
+
+<file path=ppt/slides/slide12.xml><?xml version="1.0" encoding="utf-8"?>
+<p:sld xmlns:a="http://schemas.openxmlformats.org/drawingml/2006/main" xmlns:r="http://schemas.openxmlformats.org/officeDocument/2006/relationships" xmlns:p="http://schemas.openxmlformats.org/presentationml/2006/main">
+  <p:cSld>
+    <p:spTree>
+      <p:nvGrpSpPr>
+        <p:cNvPr id="1" name=""/>
+        <p:cNvGrpSpPr/>
+        <p:nvPr/>
+      </p:nvGrpSpPr>
+      <p:grpSpPr>
+        <a:xfrm>
+          <a:off x="0" y="0"/>
+          <a:ext cx="0" cy="0"/>
+          <a:chOff x="0" y="0"/>
+          <a:chExt cx="0" cy="0"/>
+        </a:xfrm>
+      </p:grpSpPr>
+      <p:sp>
+        <p:nvSpPr>
+          <p:cNvPr id="6" name="Title 5">
+            <a:extLst>
+              <a:ext uri="{FF2B5EF4-FFF2-40B4-BE49-F238E27FC236}">
+                <a16:creationId xmlns:a16="http://schemas.microsoft.com/office/drawing/2014/main" id="{28906434-F997-27C3-919F-CE7837F349C1}"/>
+              </a:ext>
+            </a:extLst>
+          </p:cNvPr>
+          <p:cNvSpPr>
+            <a:spLocks noGrp="1"/>
+          </p:cNvSpPr>
+          <p:nvPr>
+            <p:ph type="title"/>
+          </p:nvPr>
+        </p:nvSpPr>
+        <p:spPr/>
+        <p:txBody>
+          <a:bodyPr/>
+          <a:lstStyle/>
+          <a:p>
+            <a:r>
+              <a:rPr lang="en-US" dirty="0"/>
+              <a:t>Hands-On #1</a:t>
+            </a:r>
+          </a:p>
+        </p:txBody>
+      </p:sp>
+      <p:sp>
+        <p:nvSpPr>
+          <p:cNvPr id="7" name="Text Placeholder 6">
+            <a:extLst>
+              <a:ext uri="{FF2B5EF4-FFF2-40B4-BE49-F238E27FC236}">
+                <a16:creationId xmlns:a16="http://schemas.microsoft.com/office/drawing/2014/main" id="{BAC52DAE-CBD8-631B-0394-8D79FD504D44}"/>
+              </a:ext>
+            </a:extLst>
+          </p:cNvPr>
+          <p:cNvSpPr>
+            <a:spLocks noGrp="1"/>
+          </p:cNvSpPr>
+          <p:nvPr>
+            <p:ph type="body" idx="1"/>
+          </p:nvPr>
+        </p:nvSpPr>
+        <p:spPr/>
+        <p:txBody>
+          <a:bodyPr/>
+          <a:lstStyle/>
+          <a:p>
+            <a:endParaRPr lang="en-US"/>
+          </a:p>
+        </p:txBody>
+      </p:sp>
+      <p:sp>
+        <p:nvSpPr>
+          <p:cNvPr id="4" name="Date Placeholder 3">
+            <a:extLst>
+              <a:ext uri="{FF2B5EF4-FFF2-40B4-BE49-F238E27FC236}">
+                <a16:creationId xmlns:a16="http://schemas.microsoft.com/office/drawing/2014/main" id="{D09924F4-6F02-D811-576D-4B2CB7D71CDF}"/>
+              </a:ext>
+            </a:extLst>
+          </p:cNvPr>
+          <p:cNvSpPr>
+            <a:spLocks noGrp="1"/>
+          </p:cNvSpPr>
+          <p:nvPr>
+            <p:ph type="dt" sz="half" idx="10"/>
+          </p:nvPr>
+        </p:nvSpPr>
+        <p:spPr/>
+        <p:txBody>
+          <a:bodyPr/>
+          <a:lstStyle/>
+          <a:p>
+            <a:fld id="{AD622D1A-DF83-41A8-85FF-04D90BF831D3}" type="datetime3">
+              <a:rPr lang="en-US" smtClean="0"/>
+              <a:t>22 June 2026</a:t>
+            </a:fld>
+            <a:endParaRPr lang="en-US"/>
+          </a:p>
+        </p:txBody>
+      </p:sp>
+      <p:sp>
+        <p:nvSpPr>
+          <p:cNvPr id="5" name="Slide Number Placeholder 4">
+            <a:extLst>
+              <a:ext uri="{FF2B5EF4-FFF2-40B4-BE49-F238E27FC236}">
+                <a16:creationId xmlns:a16="http://schemas.microsoft.com/office/drawing/2014/main" id="{CA5BB809-B6F6-9BC1-E54D-7C07B20D75D3}"/>
+              </a:ext>
+            </a:extLst>
+          </p:cNvPr>
+          <p:cNvSpPr>
+            <a:spLocks noGrp="1"/>
+          </p:cNvSpPr>
+          <p:nvPr>
+            <p:ph type="sldNum" sz="quarter" idx="12"/>
+          </p:nvPr>
+        </p:nvSpPr>
+        <p:spPr/>
+        <p:txBody>
+          <a:bodyPr/>
+          <a:lstStyle/>
+          <a:p>
+            <a:fld id="{64E5BE4B-2FBF-4174-9E62-85FAD1CB43A6}" type="slidenum">
+              <a:rPr lang="en-US" smtClean="0"/>
+              <a:pPr/>
+              <a:t>12</a:t>
+            </a:fld>
+            <a:endParaRPr lang="en-US"/>
+          </a:p>
+        </p:txBody>
+      </p:sp>
+    </p:spTree>
+    <p:extLst>
+      <p:ext uri="{BB962C8B-B14F-4D97-AF65-F5344CB8AC3E}">
+        <p14:creationId xmlns:p14="http://schemas.microsoft.com/office/powerpoint/2010/main" val="3674312045"/>
+      </p:ext>
+    </p:extLst>
+  </p:cSld>
+  <p:clrMapOvr>
+    <a:masterClrMapping/>
+  </p:clrMapOvr>
+</p:sld>
+</file>
+
+<file path=ppt/slides/slide13.xml><?xml version="1.0" encoding="utf-8"?>
+<p:sld xmlns:a="http://schemas.openxmlformats.org/drawingml/2006/main" xmlns:r="http://schemas.openxmlformats.org/officeDocument/2006/relationships" xmlns:p="http://schemas.openxmlformats.org/presentationml/2006/main">
+  <p:cSld>
+    <p:spTree>
+      <p:nvGrpSpPr>
+        <p:cNvPr id="1" name="">
+          <a:extLst>
+            <a:ext uri="{FF2B5EF4-FFF2-40B4-BE49-F238E27FC236}">
+              <a16:creationId xmlns:a16="http://schemas.microsoft.com/office/drawing/2014/main" id="{13B83039-C858-2C3F-18AB-3CC2B6756143}"/>
+            </a:ext>
+          </a:extLst>
+        </p:cNvPr>
+        <p:cNvGrpSpPr/>
+        <p:nvPr/>
+      </p:nvGrpSpPr>
+      <p:grpSpPr>
+        <a:xfrm>
+          <a:off x="0" y="0"/>
+          <a:ext cx="0" cy="0"/>
+          <a:chOff x="0" y="0"/>
+          <a:chExt cx="0" cy="0"/>
+        </a:xfrm>
+      </p:grpSpPr>
+      <p:sp>
+        <p:nvSpPr>
+          <p:cNvPr id="2" name="Title 1">
+            <a:extLst>
+              <a:ext uri="{FF2B5EF4-FFF2-40B4-BE49-F238E27FC236}">
+                <a16:creationId xmlns:a16="http://schemas.microsoft.com/office/drawing/2014/main" id="{8BB3A3F6-B67E-54C5-6D85-E9992D53577A}"/>
+              </a:ext>
+            </a:extLst>
+          </p:cNvPr>
+          <p:cNvSpPr>
+            <a:spLocks noGrp="1"/>
+          </p:cNvSpPr>
+          <p:nvPr>
+            <p:ph type="title"/>
+          </p:nvPr>
+        </p:nvSpPr>
+        <p:spPr>
+          <a:xfrm>
+            <a:off x="548640" y="411481"/>
+            <a:ext cx="8231293" cy="914400"/>
+          </a:xfrm>
+        </p:spPr>
+        <p:txBody>
+          <a:bodyPr/>
+          <a:lstStyle/>
+          <a:p>
+            <a:r>
+              <a:rPr lang="en-US" dirty="0"/>
+              <a:t>Authentication</a:t>
+            </a:r>
+          </a:p>
+        </p:txBody>
+      </p:sp>
+      <p:sp>
+        <p:nvSpPr>
+          <p:cNvPr id="3" name="Content Placeholder 2">
+            <a:extLst>
+              <a:ext uri="{FF2B5EF4-FFF2-40B4-BE49-F238E27FC236}">
+                <a16:creationId xmlns:a16="http://schemas.microsoft.com/office/drawing/2014/main" id="{98819479-A671-7093-4EDE-E094D956DBB4}"/>
+              </a:ext>
+            </a:extLst>
+          </p:cNvPr>
+          <p:cNvSpPr>
+            <a:spLocks noGrp="1"/>
+          </p:cNvSpPr>
+          <p:nvPr>
+            <p:ph idx="1"/>
+          </p:nvPr>
+        </p:nvSpPr>
+        <p:spPr>
+          <a:xfrm>
+            <a:off x="548640" y="1600199"/>
+            <a:ext cx="11024925" cy="4572000"/>
+          </a:xfrm>
+        </p:spPr>
+        <p:txBody>
+          <a:bodyPr/>
+          <a:lstStyle/>
+          <a:p>
+            <a:endParaRPr lang="en-US" dirty="0"/>
+          </a:p>
+        </p:txBody>
+      </p:sp>
+    </p:spTree>
+    <p:extLst>
+      <p:ext uri="{BB962C8B-B14F-4D97-AF65-F5344CB8AC3E}">
+        <p14:creationId xmlns:p14="http://schemas.microsoft.com/office/powerpoint/2010/main" val="4145989237"/>
+      </p:ext>
+    </p:extLst>
+  </p:cSld>
+  <p:clrMapOvr>
+    <a:masterClrMapping/>
+  </p:clrMapOvr>
+</p:sld>
+</file>
+
+<file path=ppt/slides/slide14.xml><?xml version="1.0" encoding="utf-8"?>
+<p:sld xmlns:a="http://schemas.openxmlformats.org/drawingml/2006/main" xmlns:r="http://schemas.openxmlformats.org/officeDocument/2006/relationships" xmlns:p="http://schemas.openxmlformats.org/presentationml/2006/main">
+  <p:cSld>
+    <p:spTree>
+      <p:nvGrpSpPr>
+        <p:cNvPr id="1" name=""/>
+        <p:cNvGrpSpPr/>
+        <p:nvPr/>
+      </p:nvGrpSpPr>
+      <p:grpSpPr>
+        <a:xfrm>
+          <a:off x="0" y="0"/>
+          <a:ext cx="0" cy="0"/>
+          <a:chOff x="0" y="0"/>
+          <a:chExt cx="0" cy="0"/>
+        </a:xfrm>
+      </p:grpSpPr>
+      <p:sp>
+        <p:nvSpPr>
+          <p:cNvPr id="5" name="Title 4">
+            <a:extLst>
+              <a:ext uri="{FF2B5EF4-FFF2-40B4-BE49-F238E27FC236}">
+                <a16:creationId xmlns:a16="http://schemas.microsoft.com/office/drawing/2014/main" id="{694CC769-791B-48CC-8DD8-3E436EE0B1A3}"/>
+              </a:ext>
+            </a:extLst>
+          </p:cNvPr>
+          <p:cNvSpPr>
+            <a:spLocks noGrp="1"/>
+          </p:cNvSpPr>
+          <p:nvPr>
+            <p:ph type="title"/>
+          </p:nvPr>
+        </p:nvSpPr>
+        <p:spPr>
+          <a:xfrm>
+            <a:off x="831850" y="1709738"/>
+            <a:ext cx="10515600" cy="2852737"/>
+          </a:xfrm>
+        </p:spPr>
+        <p:txBody>
+          <a:bodyPr/>
+          <a:lstStyle/>
+          <a:p>
+            <a:r>
+              <a:rPr lang="en-US" dirty="0"/>
+              <a:t>Questions</a:t>
+            </a:r>
+          </a:p>
+        </p:txBody>
+      </p:sp>
+      <p:sp>
+        <p:nvSpPr>
+          <p:cNvPr id="3" name="Text Placeholder 2">
+            <a:extLst>
+              <a:ext uri="{FF2B5EF4-FFF2-40B4-BE49-F238E27FC236}">
+                <a16:creationId xmlns:a16="http://schemas.microsoft.com/office/drawing/2014/main" id="{3F777F8E-CCD2-E251-54C3-3AC716544F37}"/>
+              </a:ext>
+            </a:extLst>
+          </p:cNvPr>
+          <p:cNvSpPr>
+            <a:spLocks noGrp="1"/>
+          </p:cNvSpPr>
+          <p:nvPr>
+            <p:ph type="body" idx="1"/>
+          </p:nvPr>
+        </p:nvSpPr>
+        <p:spPr/>
+        <p:txBody>
+          <a:bodyPr/>
+          <a:lstStyle/>
+          <a:p>
+            <a:endParaRPr lang="en-US"/>
+          </a:p>
+        </p:txBody>
+      </p:sp>
+    </p:spTree>
+    <p:extLst>
+      <p:ext uri="{BB962C8B-B14F-4D97-AF65-F5344CB8AC3E}">
+        <p14:creationId xmlns:p14="http://schemas.microsoft.com/office/powerpoint/2010/main" val="3276679044"/>
+      </p:ext>
+    </p:extLst>
+  </p:cSld>
+  <p:clrMapOvr>
+    <a:masterClrMapping/>
+  </p:clrMapOvr>
+</p:sld>
+</file>
+
 <file path=ppt/slides/slide2.xml><?xml version="1.0" encoding="utf-8"?>
 <p:sld xmlns:a="http://schemas.openxmlformats.org/drawingml/2006/main" xmlns:r="http://schemas.openxmlformats.org/officeDocument/2006/relationships" xmlns:p="http://schemas.openxmlformats.org/presentationml/2006/main">
   <p:cSld>
@@ -24626,12 +25478,7 @@
             <p:ph type="title"/>
           </p:nvPr>
         </p:nvSpPr>
-        <p:spPr>
-          <a:xfrm>
-            <a:off x="548640" y="411481"/>
-            <a:ext cx="8231293" cy="914400"/>
-          </a:xfrm>
-        </p:spPr>
+        <p:spPr/>
         <p:txBody>
           <a:bodyPr/>
           <a:lstStyle/>
@@ -24660,15 +25507,10 @@
             <a:spLocks noGrp="1"/>
           </p:cNvSpPr>
           <p:nvPr>
-            <p:ph sz="half" idx="1"/>
-          </p:nvPr>
-        </p:nvSpPr>
-        <p:spPr>
-          <a:xfrm>
-            <a:off x="838200" y="1825625"/>
-            <a:ext cx="5181600" cy="4351338"/>
-          </a:xfrm>
-        </p:spPr>
+            <p:ph idx="1"/>
+          </p:nvPr>
+        </p:nvSpPr>
+        <p:spPr/>
         <p:txBody>
           <a:bodyPr>
             <a:normAutofit/>
@@ -24700,31 +25542,6 @@
               <a:rPr lang="en-US" dirty="0"/>
               <a:t>Improvements and modifications over time</a:t>
             </a:r>
-          </a:p>
-        </p:txBody>
-      </p:sp>
-      <p:sp>
-        <p:nvSpPr>
-          <p:cNvPr id="7" name="Content Placeholder 6">
-            <a:extLst>
-              <a:ext uri="{FF2B5EF4-FFF2-40B4-BE49-F238E27FC236}">
-                <a16:creationId xmlns:a16="http://schemas.microsoft.com/office/drawing/2014/main" id="{4143A01C-9965-70D2-F142-61C3054AA76B}"/>
-              </a:ext>
-            </a:extLst>
-          </p:cNvPr>
-          <p:cNvSpPr>
-            <a:spLocks noGrp="1"/>
-          </p:cNvSpPr>
-          <p:nvPr>
-            <p:ph sz="half" idx="2"/>
-          </p:nvPr>
-        </p:nvSpPr>
-        <p:spPr/>
-        <p:txBody>
-          <a:bodyPr/>
-          <a:lstStyle/>
-          <a:p>
-            <a:endParaRPr lang="en-US"/>
           </a:p>
         </p:txBody>
       </p:sp>
@@ -26493,18 +27310,26 @@
           <a:p>
             <a:r>
               <a:rPr lang="en-US" dirty="0"/>
-              <a:t>Uses the requests library</a:t>
-            </a:r>
-          </a:p>
-          <a:p>
+              <a:t>Uses the requests library </a:t>
+            </a:r>
+          </a:p>
+          <a:p>
+            <a:r>
+              <a:rPr lang="en-US" dirty="0">
+                <a:hlinkClick r:id="rId2"/>
+              </a:rPr>
+              <a:t>https://docs.python-requests.org/en/latest/user/quickstart/#make-a-request</a:t>
+            </a:r>
             <a:endParaRPr lang="en-US" dirty="0"/>
           </a:p>
           <a:p>
-            <a:r>
-              <a:rPr lang="en-US"/>
+            <a:endParaRPr lang="en-US" dirty="0"/>
+          </a:p>
+          <a:p>
+            <a:r>
+              <a:rPr lang="en-US" dirty="0"/>
               <a:t>Demo</a:t>
             </a:r>
-            <a:endParaRPr lang="en-US" dirty="0"/>
           </a:p>
         </p:txBody>
       </p:sp>
@@ -26540,10 +27365,10 @@
       </p:grpSpPr>
       <p:sp>
         <p:nvSpPr>
-          <p:cNvPr id="5" name="Title 4">
-            <a:extLst>
-              <a:ext uri="{FF2B5EF4-FFF2-40B4-BE49-F238E27FC236}">
-                <a16:creationId xmlns:a16="http://schemas.microsoft.com/office/drawing/2014/main" id="{694CC769-791B-48CC-8DD8-3E436EE0B1A3}"/>
+          <p:cNvPr id="2" name="Title 1">
+            <a:extLst>
+              <a:ext uri="{FF2B5EF4-FFF2-40B4-BE49-F238E27FC236}">
+                <a16:creationId xmlns:a16="http://schemas.microsoft.com/office/drawing/2014/main" id="{E84D9E38-6DAD-E4D7-9B8A-2000494494F0}"/>
               </a:ext>
             </a:extLst>
           </p:cNvPr>
@@ -26554,37 +27379,32 @@
             <p:ph type="title"/>
           </p:nvPr>
         </p:nvSpPr>
-        <p:spPr>
-          <a:xfrm>
-            <a:off x="831850" y="1709738"/>
-            <a:ext cx="10515600" cy="2852737"/>
-          </a:xfrm>
-        </p:spPr>
+        <p:spPr/>
         <p:txBody>
           <a:bodyPr/>
           <a:lstStyle/>
           <a:p>
             <a:r>
               <a:rPr lang="en-US" dirty="0"/>
-              <a:t>Questions</a:t>
-            </a:r>
-          </a:p>
-        </p:txBody>
-      </p:sp>
-      <p:sp>
-        <p:nvSpPr>
-          <p:cNvPr id="3" name="Text Placeholder 2">
-            <a:extLst>
-              <a:ext uri="{FF2B5EF4-FFF2-40B4-BE49-F238E27FC236}">
-                <a16:creationId xmlns:a16="http://schemas.microsoft.com/office/drawing/2014/main" id="{3F777F8E-CCD2-E251-54C3-3AC716544F37}"/>
-              </a:ext>
-            </a:extLst>
-          </p:cNvPr>
-          <p:cNvSpPr>
-            <a:spLocks noGrp="1"/>
-          </p:cNvSpPr>
-          <p:nvPr>
-            <p:ph type="body" idx="1"/>
+              <a:t>More Than Text</a:t>
+            </a:r>
+          </a:p>
+        </p:txBody>
+      </p:sp>
+      <p:sp>
+        <p:nvSpPr>
+          <p:cNvPr id="3" name="Content Placeholder 2">
+            <a:extLst>
+              <a:ext uri="{FF2B5EF4-FFF2-40B4-BE49-F238E27FC236}">
+                <a16:creationId xmlns:a16="http://schemas.microsoft.com/office/drawing/2014/main" id="{9A27DC0E-A2EB-AAA5-26E5-80B2C604BDF2}"/>
+              </a:ext>
+            </a:extLst>
+          </p:cNvPr>
+          <p:cNvSpPr>
+            <a:spLocks noGrp="1"/>
+          </p:cNvSpPr>
+          <p:nvPr>
+            <p:ph idx="1"/>
           </p:nvPr>
         </p:nvSpPr>
         <p:spPr/>
@@ -26592,6 +27412,83 @@
           <a:bodyPr/>
           <a:lstStyle/>
           <a:p>
+            <a:r>
+              <a:rPr lang="en-US" dirty="0"/>
+              <a:t>Have you ever seen an image online?</a:t>
+            </a:r>
+          </a:p>
+          <a:p>
+            <a:r>
+              <a:rPr lang="en-US" dirty="0"/>
+              <a:t>Have you ever seen a video?</a:t>
+            </a:r>
+          </a:p>
+          <a:p>
+            <a:r>
+              <a:rPr lang="en-US" dirty="0"/>
+              <a:t>Other formats??</a:t>
+            </a:r>
+          </a:p>
+          <a:p>
+            <a:endParaRPr lang="en-US" dirty="0"/>
+          </a:p>
+        </p:txBody>
+      </p:sp>
+      <p:sp>
+        <p:nvSpPr>
+          <p:cNvPr id="4" name="Date Placeholder 3">
+            <a:extLst>
+              <a:ext uri="{FF2B5EF4-FFF2-40B4-BE49-F238E27FC236}">
+                <a16:creationId xmlns:a16="http://schemas.microsoft.com/office/drawing/2014/main" id="{BA21DF7F-179D-93A4-A34C-19AFA15CC350}"/>
+              </a:ext>
+            </a:extLst>
+          </p:cNvPr>
+          <p:cNvSpPr>
+            <a:spLocks noGrp="1"/>
+          </p:cNvSpPr>
+          <p:nvPr>
+            <p:ph type="dt" sz="half" idx="10"/>
+          </p:nvPr>
+        </p:nvSpPr>
+        <p:spPr/>
+        <p:txBody>
+          <a:bodyPr/>
+          <a:lstStyle/>
+          <a:p>
+            <a:fld id="{AD622D1A-DF83-41A8-85FF-04D90BF831D3}" type="datetime3">
+              <a:rPr lang="en-US" smtClean="0"/>
+              <a:t>22 June 2026</a:t>
+            </a:fld>
+            <a:endParaRPr lang="en-US"/>
+          </a:p>
+        </p:txBody>
+      </p:sp>
+      <p:sp>
+        <p:nvSpPr>
+          <p:cNvPr id="5" name="Slide Number Placeholder 4">
+            <a:extLst>
+              <a:ext uri="{FF2B5EF4-FFF2-40B4-BE49-F238E27FC236}">
+                <a16:creationId xmlns:a16="http://schemas.microsoft.com/office/drawing/2014/main" id="{B3F49F5A-5999-7FEE-3F3E-C8FE162C0607}"/>
+              </a:ext>
+            </a:extLst>
+          </p:cNvPr>
+          <p:cNvSpPr>
+            <a:spLocks noGrp="1"/>
+          </p:cNvSpPr>
+          <p:nvPr>
+            <p:ph type="sldNum" sz="quarter" idx="11"/>
+          </p:nvPr>
+        </p:nvSpPr>
+        <p:spPr/>
+        <p:txBody>
+          <a:bodyPr/>
+          <a:lstStyle/>
+          <a:p>
+            <a:fld id="{64E5BE4B-2FBF-4174-9E62-85FAD1CB43A6}" type="slidenum">
+              <a:rPr lang="en-US" smtClean="0"/>
+              <a:pPr/>
+              <a:t>8</a:t>
+            </a:fld>
             <a:endParaRPr lang="en-US"/>
           </a:p>
         </p:txBody>
@@ -26599,7 +27496,661 @@
     </p:spTree>
     <p:extLst>
       <p:ext uri="{BB962C8B-B14F-4D97-AF65-F5344CB8AC3E}">
-        <p14:creationId xmlns:p14="http://schemas.microsoft.com/office/powerpoint/2010/main" val="3276679044"/>
+        <p14:creationId xmlns:p14="http://schemas.microsoft.com/office/powerpoint/2010/main" val="2622715224"/>
+      </p:ext>
+    </p:extLst>
+  </p:cSld>
+  <p:clrMapOvr>
+    <a:masterClrMapping/>
+  </p:clrMapOvr>
+</p:sld>
+</file>
+
+<file path=ppt/slides/slide9.xml><?xml version="1.0" encoding="utf-8"?>
+<p:sld xmlns:a="http://schemas.openxmlformats.org/drawingml/2006/main" xmlns:r="http://schemas.openxmlformats.org/officeDocument/2006/relationships" xmlns:p="http://schemas.openxmlformats.org/presentationml/2006/main">
+  <p:cSld>
+    <p:spTree>
+      <p:nvGrpSpPr>
+        <p:cNvPr id="1" name=""/>
+        <p:cNvGrpSpPr/>
+        <p:nvPr/>
+      </p:nvGrpSpPr>
+      <p:grpSpPr>
+        <a:xfrm>
+          <a:off x="0" y="0"/>
+          <a:ext cx="0" cy="0"/>
+          <a:chOff x="0" y="0"/>
+          <a:chExt cx="0" cy="0"/>
+        </a:xfrm>
+      </p:grpSpPr>
+      <p:sp>
+        <p:nvSpPr>
+          <p:cNvPr id="2" name="Title 1">
+            <a:extLst>
+              <a:ext uri="{FF2B5EF4-FFF2-40B4-BE49-F238E27FC236}">
+                <a16:creationId xmlns:a16="http://schemas.microsoft.com/office/drawing/2014/main" id="{26D93320-3E63-D43F-8353-454E919E51F8}"/>
+              </a:ext>
+            </a:extLst>
+          </p:cNvPr>
+          <p:cNvSpPr>
+            <a:spLocks noGrp="1"/>
+          </p:cNvSpPr>
+          <p:nvPr>
+            <p:ph type="title"/>
+          </p:nvPr>
+        </p:nvSpPr>
+        <p:spPr/>
+        <p:txBody>
+          <a:bodyPr/>
+          <a:lstStyle/>
+          <a:p>
+            <a:r>
+              <a:rPr lang="en-US" dirty="0"/>
+              <a:t>Encoding Text</a:t>
+            </a:r>
+          </a:p>
+        </p:txBody>
+      </p:sp>
+      <p:sp>
+        <p:nvSpPr>
+          <p:cNvPr id="3" name="Content Placeholder 2">
+            <a:extLst>
+              <a:ext uri="{FF2B5EF4-FFF2-40B4-BE49-F238E27FC236}">
+                <a16:creationId xmlns:a16="http://schemas.microsoft.com/office/drawing/2014/main" id="{AA901D3A-6F2F-A254-2420-040EC3411AEA}"/>
+              </a:ext>
+            </a:extLst>
+          </p:cNvPr>
+          <p:cNvSpPr>
+            <a:spLocks noGrp="1"/>
+          </p:cNvSpPr>
+          <p:nvPr>
+            <p:ph idx="1"/>
+          </p:nvPr>
+        </p:nvSpPr>
+        <p:spPr/>
+        <p:txBody>
+          <a:bodyPr/>
+          <a:lstStyle/>
+          <a:p>
+            <a:r>
+              <a:rPr lang="en-US" dirty="0"/>
+              <a:t>Remember all data is binary</a:t>
+            </a:r>
+          </a:p>
+          <a:p>
+            <a:r>
+              <a:rPr lang="en-US" dirty="0"/>
+              <a:t>Computer must represent data consistently</a:t>
+            </a:r>
+          </a:p>
+          <a:p>
+            <a:r>
+              <a:rPr lang="en-US" dirty="0"/>
+              <a:t>An encoding specifies the data representation</a:t>
+            </a:r>
+          </a:p>
+          <a:p>
+            <a:endParaRPr lang="en-US" dirty="0"/>
+          </a:p>
+          <a:p>
+            <a:endParaRPr lang="en-US" dirty="0"/>
+          </a:p>
+        </p:txBody>
+      </p:sp>
+      <p:sp>
+        <p:nvSpPr>
+          <p:cNvPr id="4" name="Date Placeholder 3">
+            <a:extLst>
+              <a:ext uri="{FF2B5EF4-FFF2-40B4-BE49-F238E27FC236}">
+                <a16:creationId xmlns:a16="http://schemas.microsoft.com/office/drawing/2014/main" id="{25A4AFED-28E0-462A-17C6-7EB8DBEC3ED1}"/>
+              </a:ext>
+            </a:extLst>
+          </p:cNvPr>
+          <p:cNvSpPr>
+            <a:spLocks noGrp="1"/>
+          </p:cNvSpPr>
+          <p:nvPr>
+            <p:ph type="dt" sz="half" idx="10"/>
+          </p:nvPr>
+        </p:nvSpPr>
+        <p:spPr/>
+        <p:txBody>
+          <a:bodyPr/>
+          <a:lstStyle/>
+          <a:p>
+            <a:fld id="{AD622D1A-DF83-41A8-85FF-04D90BF831D3}" type="datetime3">
+              <a:rPr lang="en-US" smtClean="0"/>
+              <a:t>22 June 2026</a:t>
+            </a:fld>
+            <a:endParaRPr lang="en-US"/>
+          </a:p>
+        </p:txBody>
+      </p:sp>
+      <p:sp>
+        <p:nvSpPr>
+          <p:cNvPr id="5" name="Slide Number Placeholder 4">
+            <a:extLst>
+              <a:ext uri="{FF2B5EF4-FFF2-40B4-BE49-F238E27FC236}">
+                <a16:creationId xmlns:a16="http://schemas.microsoft.com/office/drawing/2014/main" id="{5C026297-B7AE-DE85-62A2-3FA449FB2059}"/>
+              </a:ext>
+            </a:extLst>
+          </p:cNvPr>
+          <p:cNvSpPr>
+            <a:spLocks noGrp="1"/>
+          </p:cNvSpPr>
+          <p:nvPr>
+            <p:ph type="sldNum" sz="quarter" idx="11"/>
+          </p:nvPr>
+        </p:nvSpPr>
+        <p:spPr/>
+        <p:txBody>
+          <a:bodyPr/>
+          <a:lstStyle/>
+          <a:p>
+            <a:fld id="{64E5BE4B-2FBF-4174-9E62-85FAD1CB43A6}" type="slidenum">
+              <a:rPr lang="en-US" smtClean="0"/>
+              <a:pPr/>
+              <a:t>9</a:t>
+            </a:fld>
+            <a:endParaRPr lang="en-US"/>
+          </a:p>
+        </p:txBody>
+      </p:sp>
+      <p:graphicFrame>
+        <p:nvGraphicFramePr>
+          <p:cNvPr id="8" name="Table 7">
+            <a:extLst>
+              <a:ext uri="{FF2B5EF4-FFF2-40B4-BE49-F238E27FC236}">
+                <a16:creationId xmlns:a16="http://schemas.microsoft.com/office/drawing/2014/main" id="{9B09FF67-D76C-EDEB-DEB6-C8DC018CC54B}"/>
+              </a:ext>
+            </a:extLst>
+          </p:cNvPr>
+          <p:cNvGraphicFramePr>
+            <a:graphicFrameLocks noGrp="1"/>
+          </p:cNvGraphicFramePr>
+          <p:nvPr>
+            <p:extLst>
+              <p:ext uri="{D42A27DB-BD31-4B8C-83A1-F6EECF244321}">
+                <p14:modId xmlns:p14="http://schemas.microsoft.com/office/powerpoint/2010/main" val="3374590313"/>
+              </p:ext>
+            </p:extLst>
+          </p:nvPr>
+        </p:nvGraphicFramePr>
+        <p:xfrm>
+          <a:off x="259508" y="3547989"/>
+          <a:ext cx="11093448" cy="2270760"/>
+        </p:xfrm>
+        <a:graphic>
+          <a:graphicData uri="http://schemas.openxmlformats.org/drawingml/2006/table">
+            <a:tbl>
+              <a:tblPr bandRow="1">
+                <a:tableStyleId>{9D7B26C5-4107-4FEC-AEDC-1716B250A1EF}</a:tableStyleId>
+              </a:tblPr>
+              <a:tblGrid>
+                <a:gridCol w="1663076">
+                  <a:extLst>
+                    <a:ext uri="{9D8B030D-6E8A-4147-A177-3AD203B41FA5}">
+                      <a16:colId xmlns:a16="http://schemas.microsoft.com/office/drawing/2014/main" val="2605838210"/>
+                    </a:ext>
+                  </a:extLst>
+                </a:gridCol>
+                <a:gridCol w="3883648">
+                  <a:extLst>
+                    <a:ext uri="{9D8B030D-6E8A-4147-A177-3AD203B41FA5}">
+                      <a16:colId xmlns:a16="http://schemas.microsoft.com/office/drawing/2014/main" val="1110831575"/>
+                    </a:ext>
+                  </a:extLst>
+                </a:gridCol>
+                <a:gridCol w="2773362">
+                  <a:extLst>
+                    <a:ext uri="{9D8B030D-6E8A-4147-A177-3AD203B41FA5}">
+                      <a16:colId xmlns:a16="http://schemas.microsoft.com/office/drawing/2014/main" val="1054237498"/>
+                    </a:ext>
+                  </a:extLst>
+                </a:gridCol>
+                <a:gridCol w="2773362">
+                  <a:extLst>
+                    <a:ext uri="{9D8B030D-6E8A-4147-A177-3AD203B41FA5}">
+                      <a16:colId xmlns:a16="http://schemas.microsoft.com/office/drawing/2014/main" val="2552619271"/>
+                    </a:ext>
+                  </a:extLst>
+                </a:gridCol>
+              </a:tblGrid>
+              <a:tr h="350520">
+                <a:tc>
+                  <a:txBody>
+                    <a:bodyPr/>
+                    <a:lstStyle/>
+                    <a:p>
+                      <a:pPr algn="ctr">
+                        <a:buNone/>
+                      </a:pPr>
+                      <a:r>
+                        <a:rPr lang="en-US" sz="1700" b="1" dirty="0">
+                          <a:effectLst/>
+                        </a:rPr>
+                        <a:t>Character</a:t>
+                      </a:r>
+                    </a:p>
+                  </a:txBody>
+                  <a:tcPr anchor="ctr"/>
+                </a:tc>
+                <a:tc>
+                  <a:txBody>
+                    <a:bodyPr/>
+                    <a:lstStyle/>
+                    <a:p>
+                      <a:pPr algn="l">
+                        <a:buNone/>
+                      </a:pPr>
+                      <a:r>
+                        <a:rPr lang="en-US" sz="1700" b="1" dirty="0">
+                          <a:effectLst/>
+                        </a:rPr>
+                        <a:t>UTF-8 (Binary)</a:t>
+                      </a:r>
+                    </a:p>
+                  </a:txBody>
+                  <a:tcPr anchor="ctr"/>
+                </a:tc>
+                <a:tc>
+                  <a:txBody>
+                    <a:bodyPr/>
+                    <a:lstStyle/>
+                    <a:p>
+                      <a:pPr algn="l">
+                        <a:buNone/>
+                      </a:pPr>
+                      <a:r>
+                        <a:rPr lang="en-US" sz="1700" b="1" dirty="0">
+                          <a:effectLst/>
+                        </a:rPr>
+                        <a:t>Windows-1252 (Binary)</a:t>
+                      </a:r>
+                    </a:p>
+                  </a:txBody>
+                  <a:tcPr anchor="ctr"/>
+                </a:tc>
+                <a:tc>
+                  <a:txBody>
+                    <a:bodyPr/>
+                    <a:lstStyle/>
+                    <a:p>
+                      <a:pPr algn="l">
+                        <a:buNone/>
+                      </a:pPr>
+                      <a:r>
+                        <a:rPr lang="en-US" sz="1700" b="1" dirty="0">
+                          <a:effectLst/>
+                        </a:rPr>
+                        <a:t>UTF-16LE (Binary)</a:t>
+                      </a:r>
+                    </a:p>
+                  </a:txBody>
+                  <a:tcPr anchor="ctr"/>
+                </a:tc>
+                <a:extLst>
+                  <a:ext uri="{0D108BD9-81ED-4DB2-BD59-A6C34878D82A}">
+                    <a16:rowId xmlns:a16="http://schemas.microsoft.com/office/drawing/2014/main" val="2801382232"/>
+                  </a:ext>
+                </a:extLst>
+              </a:tr>
+              <a:tr h="350520">
+                <a:tc>
+                  <a:txBody>
+                    <a:bodyPr/>
+                    <a:lstStyle/>
+                    <a:p>
+                      <a:pPr algn="ctr">
+                        <a:buNone/>
+                      </a:pPr>
+                      <a:r>
+                        <a:rPr lang="en-US" sz="1700" dirty="0">
+                          <a:effectLst/>
+                          <a:latin typeface="Courier New" panose="02070309020205020404" pitchFamily="49" charset="0"/>
+                          <a:cs typeface="Courier New" panose="02070309020205020404" pitchFamily="49" charset="0"/>
+                        </a:rPr>
+                        <a:t>A</a:t>
+                      </a:r>
+                    </a:p>
+                  </a:txBody>
+                  <a:tcPr anchor="ctr"/>
+                </a:tc>
+                <a:tc>
+                  <a:txBody>
+                    <a:bodyPr/>
+                    <a:lstStyle/>
+                    <a:p>
+                      <a:pPr algn="l">
+                        <a:buNone/>
+                      </a:pPr>
+                      <a:r>
+                        <a:rPr lang="en-US" sz="1700" dirty="0">
+                          <a:effectLst/>
+                          <a:latin typeface="Courier New" panose="02070309020205020404" pitchFamily="49" charset="0"/>
+                          <a:cs typeface="Courier New" panose="02070309020205020404" pitchFamily="49" charset="0"/>
+                        </a:rPr>
+                        <a:t>01000001</a:t>
+                      </a:r>
+                    </a:p>
+                  </a:txBody>
+                  <a:tcPr anchor="ctr"/>
+                </a:tc>
+                <a:tc>
+                  <a:txBody>
+                    <a:bodyPr/>
+                    <a:lstStyle/>
+                    <a:p>
+                      <a:pPr algn="l">
+                        <a:buNone/>
+                      </a:pPr>
+                      <a:r>
+                        <a:rPr lang="en-US" sz="1700">
+                          <a:effectLst/>
+                          <a:latin typeface="Courier New" panose="02070309020205020404" pitchFamily="49" charset="0"/>
+                          <a:cs typeface="Courier New" panose="02070309020205020404" pitchFamily="49" charset="0"/>
+                        </a:rPr>
+                        <a:t>01000001</a:t>
+                      </a:r>
+                    </a:p>
+                  </a:txBody>
+                  <a:tcPr anchor="ctr"/>
+                </a:tc>
+                <a:tc>
+                  <a:txBody>
+                    <a:bodyPr/>
+                    <a:lstStyle/>
+                    <a:p>
+                      <a:pPr algn="l">
+                        <a:buNone/>
+                      </a:pPr>
+                      <a:r>
+                        <a:rPr lang="en-US" sz="1700">
+                          <a:effectLst/>
+                          <a:latin typeface="Courier New" panose="02070309020205020404" pitchFamily="49" charset="0"/>
+                          <a:cs typeface="Courier New" panose="02070309020205020404" pitchFamily="49" charset="0"/>
+                        </a:rPr>
+                        <a:t>01000001 00000000</a:t>
+                      </a:r>
+                    </a:p>
+                  </a:txBody>
+                  <a:tcPr anchor="ctr"/>
+                </a:tc>
+                <a:extLst>
+                  <a:ext uri="{0D108BD9-81ED-4DB2-BD59-A6C34878D82A}">
+                    <a16:rowId xmlns:a16="http://schemas.microsoft.com/office/drawing/2014/main" val="2255597038"/>
+                  </a:ext>
+                </a:extLst>
+              </a:tr>
+              <a:tr h="350520">
+                <a:tc>
+                  <a:txBody>
+                    <a:bodyPr/>
+                    <a:lstStyle/>
+                    <a:p>
+                      <a:pPr algn="ctr">
+                        <a:buNone/>
+                      </a:pPr>
+                      <a:r>
+                        <a:rPr lang="en-US" sz="1700" dirty="0">
+                          <a:effectLst/>
+                          <a:latin typeface="Courier New" panose="02070309020205020404" pitchFamily="49" charset="0"/>
+                          <a:cs typeface="Courier New" panose="02070309020205020404" pitchFamily="49" charset="0"/>
+                        </a:rPr>
+                        <a:t>é</a:t>
+                      </a:r>
+                    </a:p>
+                  </a:txBody>
+                  <a:tcPr anchor="ctr"/>
+                </a:tc>
+                <a:tc>
+                  <a:txBody>
+                    <a:bodyPr/>
+                    <a:lstStyle/>
+                    <a:p>
+                      <a:pPr algn="l">
+                        <a:buNone/>
+                      </a:pPr>
+                      <a:r>
+                        <a:rPr lang="en-US" sz="1700" dirty="0">
+                          <a:effectLst/>
+                          <a:latin typeface="Courier New" panose="02070309020205020404" pitchFamily="49" charset="0"/>
+                          <a:cs typeface="Courier New" panose="02070309020205020404" pitchFamily="49" charset="0"/>
+                        </a:rPr>
+                        <a:t>11000011 10101001</a:t>
+                      </a:r>
+                    </a:p>
+                  </a:txBody>
+                  <a:tcPr anchor="ctr"/>
+                </a:tc>
+                <a:tc>
+                  <a:txBody>
+                    <a:bodyPr/>
+                    <a:lstStyle/>
+                    <a:p>
+                      <a:pPr algn="l">
+                        <a:buNone/>
+                      </a:pPr>
+                      <a:r>
+                        <a:rPr lang="en-US" sz="1700">
+                          <a:effectLst/>
+                          <a:latin typeface="Courier New" panose="02070309020205020404" pitchFamily="49" charset="0"/>
+                          <a:cs typeface="Courier New" panose="02070309020205020404" pitchFamily="49" charset="0"/>
+                        </a:rPr>
+                        <a:t>11101001</a:t>
+                      </a:r>
+                    </a:p>
+                  </a:txBody>
+                  <a:tcPr anchor="ctr"/>
+                </a:tc>
+                <a:tc>
+                  <a:txBody>
+                    <a:bodyPr/>
+                    <a:lstStyle/>
+                    <a:p>
+                      <a:pPr algn="l">
+                        <a:buNone/>
+                      </a:pPr>
+                      <a:r>
+                        <a:rPr lang="en-US" sz="1700">
+                          <a:effectLst/>
+                          <a:latin typeface="Courier New" panose="02070309020205020404" pitchFamily="49" charset="0"/>
+                          <a:cs typeface="Courier New" panose="02070309020205020404" pitchFamily="49" charset="0"/>
+                        </a:rPr>
+                        <a:t>00101001 00000110</a:t>
+                      </a:r>
+                    </a:p>
+                  </a:txBody>
+                  <a:tcPr anchor="ctr"/>
+                </a:tc>
+                <a:extLst>
+                  <a:ext uri="{0D108BD9-81ED-4DB2-BD59-A6C34878D82A}">
+                    <a16:rowId xmlns:a16="http://schemas.microsoft.com/office/drawing/2014/main" val="696482109"/>
+                  </a:ext>
+                </a:extLst>
+              </a:tr>
+              <a:tr h="609600">
+                <a:tc>
+                  <a:txBody>
+                    <a:bodyPr/>
+                    <a:lstStyle/>
+                    <a:p>
+                      <a:pPr algn="ctr">
+                        <a:buNone/>
+                      </a:pPr>
+                      <a:r>
+                        <a:rPr lang="en-US" sz="1700">
+                          <a:effectLst/>
+                          <a:latin typeface="Courier New" panose="02070309020205020404" pitchFamily="49" charset="0"/>
+                          <a:cs typeface="Courier New" panose="02070309020205020404" pitchFamily="49" charset="0"/>
+                        </a:rPr>
+                        <a:t>€</a:t>
+                      </a:r>
+                    </a:p>
+                  </a:txBody>
+                  <a:tcPr anchor="ctr"/>
+                </a:tc>
+                <a:tc>
+                  <a:txBody>
+                    <a:bodyPr/>
+                    <a:lstStyle/>
+                    <a:p>
+                      <a:pPr algn="l">
+                        <a:buNone/>
+                      </a:pPr>
+                      <a:r>
+                        <a:rPr lang="en-US" sz="1700" dirty="0">
+                          <a:effectLst/>
+                          <a:latin typeface="Courier New" panose="02070309020205020404" pitchFamily="49" charset="0"/>
+                          <a:cs typeface="Courier New" panose="02070309020205020404" pitchFamily="49" charset="0"/>
+                        </a:rPr>
+                        <a:t>11100010 10000010 10101100</a:t>
+                      </a:r>
+                    </a:p>
+                  </a:txBody>
+                  <a:tcPr anchor="ctr"/>
+                </a:tc>
+                <a:tc>
+                  <a:txBody>
+                    <a:bodyPr/>
+                    <a:lstStyle/>
+                    <a:p>
+                      <a:pPr algn="l">
+                        <a:buNone/>
+                      </a:pPr>
+                      <a:r>
+                        <a:rPr lang="en-US" sz="1700" dirty="0">
+                          <a:effectLst/>
+                          <a:latin typeface="Courier New" panose="02070309020205020404" pitchFamily="49" charset="0"/>
+                          <a:cs typeface="Courier New" panose="02070309020205020404" pitchFamily="49" charset="0"/>
+                        </a:rPr>
+                        <a:t>10000000</a:t>
+                      </a:r>
+                    </a:p>
+                  </a:txBody>
+                  <a:tcPr anchor="ctr"/>
+                </a:tc>
+                <a:tc>
+                  <a:txBody>
+                    <a:bodyPr/>
+                    <a:lstStyle/>
+                    <a:p>
+                      <a:pPr algn="l">
+                        <a:buNone/>
+                      </a:pPr>
+                      <a:r>
+                        <a:rPr lang="en-US" sz="1700" dirty="0">
+                          <a:effectLst/>
+                          <a:latin typeface="Courier New" panose="02070309020205020404" pitchFamily="49" charset="0"/>
+                          <a:cs typeface="Courier New" panose="02070309020205020404" pitchFamily="49" charset="0"/>
+                        </a:rPr>
+                        <a:t>00001010 00100000</a:t>
+                      </a:r>
+                    </a:p>
+                  </a:txBody>
+                  <a:tcPr anchor="ctr"/>
+                </a:tc>
+                <a:extLst>
+                  <a:ext uri="{0D108BD9-81ED-4DB2-BD59-A6C34878D82A}">
+                    <a16:rowId xmlns:a16="http://schemas.microsoft.com/office/drawing/2014/main" val="222122572"/>
+                  </a:ext>
+                </a:extLst>
+              </a:tr>
+              <a:tr h="609600">
+                <a:tc>
+                  <a:txBody>
+                    <a:bodyPr/>
+                    <a:lstStyle/>
+                    <a:p>
+                      <a:pPr algn="ctr">
+                        <a:buNone/>
+                      </a:pPr>
+                      <a:r>
+                        <a:rPr lang="en-US" sz="1700" dirty="0">
+                          <a:effectLst/>
+                          <a:latin typeface="Courier New" panose="02070309020205020404" pitchFamily="49" charset="0"/>
+                          <a:cs typeface="Courier New" panose="02070309020205020404" pitchFamily="49" charset="0"/>
+                        </a:rPr>
+                        <a:t>"</a:t>
+                      </a:r>
+                    </a:p>
+                  </a:txBody>
+                  <a:tcPr anchor="ctr"/>
+                </a:tc>
+                <a:tc>
+                  <a:txBody>
+                    <a:bodyPr/>
+                    <a:lstStyle/>
+                    <a:p>
+                      <a:pPr algn="l">
+                        <a:buNone/>
+                      </a:pPr>
+                      <a:r>
+                        <a:rPr lang="en-US" sz="1700">
+                          <a:effectLst/>
+                          <a:latin typeface="Courier New" panose="02070309020205020404" pitchFamily="49" charset="0"/>
+                          <a:cs typeface="Courier New" panose="02070309020205020404" pitchFamily="49" charset="0"/>
+                        </a:rPr>
+                        <a:t>11100010 10000000 10011100</a:t>
+                      </a:r>
+                    </a:p>
+                  </a:txBody>
+                  <a:tcPr anchor="ctr"/>
+                </a:tc>
+                <a:tc>
+                  <a:txBody>
+                    <a:bodyPr/>
+                    <a:lstStyle/>
+                    <a:p>
+                      <a:pPr algn="l">
+                        <a:buNone/>
+                      </a:pPr>
+                      <a:r>
+                        <a:rPr lang="en-US" sz="1700">
+                          <a:effectLst/>
+                          <a:latin typeface="Courier New" panose="02070309020205020404" pitchFamily="49" charset="0"/>
+                          <a:cs typeface="Courier New" panose="02070309020205020404" pitchFamily="49" charset="0"/>
+                        </a:rPr>
+                        <a:t>10010100</a:t>
+                      </a:r>
+                    </a:p>
+                  </a:txBody>
+                  <a:tcPr anchor="ctr"/>
+                </a:tc>
+                <a:tc>
+                  <a:txBody>
+                    <a:bodyPr/>
+                    <a:lstStyle/>
+                    <a:p>
+                      <a:pPr algn="l">
+                        <a:buNone/>
+                      </a:pPr>
+                      <a:r>
+                        <a:rPr lang="en-US" sz="1700" dirty="0">
+                          <a:effectLst/>
+                          <a:latin typeface="Courier New" panose="02070309020205020404" pitchFamily="49" charset="0"/>
+                          <a:cs typeface="Courier New" panose="02070309020205020404" pitchFamily="49" charset="0"/>
+                        </a:rPr>
+                        <a:t>01000000 01001111</a:t>
+                      </a:r>
+                    </a:p>
+                  </a:txBody>
+                  <a:tcPr anchor="ctr"/>
+                </a:tc>
+                <a:extLst>
+                  <a:ext uri="{0D108BD9-81ED-4DB2-BD59-A6C34878D82A}">
+                    <a16:rowId xmlns:a16="http://schemas.microsoft.com/office/drawing/2014/main" val="2434604165"/>
+                  </a:ext>
+                </a:extLst>
+              </a:tr>
+            </a:tbl>
+          </a:graphicData>
+        </a:graphic>
+      </p:graphicFrame>
+    </p:spTree>
+    <p:extLst>
+      <p:ext uri="{BB962C8B-B14F-4D97-AF65-F5344CB8AC3E}">
+        <p14:creationId xmlns:p14="http://schemas.microsoft.com/office/powerpoint/2010/main" val="413071828"/>
       </p:ext>
     </p:extLst>
   </p:cSld>
